--- a/classes/parte-8-blue-team-deteccion-y-soc/193-deteccion-de-c2-y-beaconing/clase-193-presentacion.pptx
+++ b/classes/parte-8-blue-team-deteccion-y-soc/193-deteccion-de-c2-y-beaconing/clase-193-presentacion.pptx
@@ -17,6 +17,11 @@
     <p:sldId id="265" r:id="rId16"/>
     <p:sldId id="266" r:id="rId17"/>
     <p:sldId id="267" r:id="rId18"/>
+    <p:sldId id="268" r:id="rId19"/>
+    <p:sldId id="269" r:id="rId20"/>
+    <p:sldId id="270" r:id="rId21"/>
+    <p:sldId id="271" r:id="rId22"/>
+    <p:sldId id="272" r:id="rId23"/>
   </p:sldIdLst>
   <p:sldSz cx="9144000" cy="6858000" type="screen4x3"/>
   <p:notesSz cx="6858000" cy="9144000"/>
@@ -3198,7 +3203,7 @@
                   <a:srgbClr val="0B3D2E"/>
                 </a:solidFill>
               </a:rPr>
-              <a:t>⚠️ Errores comunes</a:t>
+              <a:t>🧰 Herramientas y preparación</a:t>
             </a:r>
           </a:p>
         </p:txBody>
@@ -3236,67 +3241,82 @@
                   <a:srgbClr val="22282E"/>
                 </a:solidFill>
               </a:rPr>
-              <a:t>•  Servicios legítimos marcan como beacon — Telemetría, updates y sync también son periódicos; añade allowlist</a:t>
-            </a:r>
-          </a:p>
-          <a:p>
-            <a:pPr>
-              <a:spcAft>
-                <a:spcPts val="600"/>
-              </a:spcAft>
-            </a:pPr>
-            <a:r>
-              <a:rPr sz="1500">
-                <a:solidFill>
-                  <a:srgbClr val="22282E"/>
-                </a:solidFill>
-              </a:rPr>
-              <a:t>•  Jitter alto evade tu regla — Umbral de varianza rígido; usa análisis estadístico (RITA) más tolerante</a:t>
-            </a:r>
-          </a:p>
-          <a:p>
-            <a:pPr>
-              <a:spcAft>
-                <a:spcPts val="600"/>
-              </a:spcAft>
-            </a:pPr>
-            <a:r>
-              <a:rPr sz="1500">
-                <a:solidFill>
-                  <a:srgbClr val="22282E"/>
-                </a:solidFill>
-              </a:rPr>
-              <a:t>•  No ves C2 sobre DNS — Falta logging DNS; captura con Zeek/Sysmon 22</a:t>
-            </a:r>
-          </a:p>
-          <a:p>
-            <a:pPr>
-              <a:spcAft>
-                <a:spcPts val="600"/>
-              </a:spcAft>
-            </a:pPr>
-            <a:r>
-              <a:rPr sz="1500">
-                <a:solidFill>
-                  <a:srgbClr val="22282E"/>
-                </a:solidFill>
-              </a:rPr>
-              <a:t>•  JA3 no identifica nada — Framework con perfil malleable; combina con periodicidad y volumen</a:t>
-            </a:r>
-          </a:p>
-          <a:p>
-            <a:pPr>
-              <a:spcAft>
-                <a:spcPts val="600"/>
-              </a:spcAft>
-            </a:pPr>
-            <a:r>
-              <a:rPr sz="1500">
-                <a:solidFill>
-                  <a:srgbClr val="22282E"/>
-                </a:solidFill>
-              </a:rPr>
-              <a:t>•  Falsos positivos de CDN — Malleable/domain fronting; correlaciona SNI vs Host y con endpoint</a:t>
+              <a:t>•  En laboratorio aislado:</a:t>
+            </a:r>
+          </a:p>
+          <a:p>
+            <a:pPr>
+              <a:spcAft>
+                <a:spcPts val="600"/>
+              </a:spcAft>
+            </a:pPr>
+            <a:r>
+              <a:rPr sz="1500">
+                <a:solidFill>
+                  <a:srgbClr val="22282E"/>
+                </a:solidFill>
+              </a:rPr>
+              <a:t>•  Zeek (conn/dns/ssl.log) y Suricata como fuentes de red.</a:t>
+            </a:r>
+          </a:p>
+          <a:p>
+            <a:pPr>
+              <a:spcAft>
+                <a:spcPts val="600"/>
+              </a:spcAft>
+            </a:pPr>
+            <a:r>
+              <a:rPr sz="1500">
+                <a:solidFill>
+                  <a:srgbClr val="22282E"/>
+                </a:solidFill>
+              </a:rPr>
+              <a:t>•  RITA para análisis de beaconing y DNS tunneling sobre logs de Zeek.</a:t>
+            </a:r>
+          </a:p>
+          <a:p>
+            <a:pPr>
+              <a:spcAft>
+                <a:spcPts val="600"/>
+              </a:spcAft>
+            </a:pPr>
+            <a:r>
+              <a:rPr sz="1500">
+                <a:solidFill>
+                  <a:srgbClr val="22282E"/>
+                </a:solidFill>
+              </a:rPr>
+              <a:t>•  Un framework C2 de laboratorio para generar tráfico de prueba (p. ej. un teamserver propio o un simulador de beacon benigno).</a:t>
+            </a:r>
+          </a:p>
+          <a:p>
+            <a:pPr>
+              <a:spcAft>
+                <a:spcPts val="600"/>
+              </a:spcAft>
+            </a:pPr>
+            <a:r>
+              <a:rPr sz="1500">
+                <a:solidFill>
+                  <a:srgbClr val="22282E"/>
+                </a:solidFill>
+              </a:rPr>
+              <a:t>•  Tu SIEM y la telemetría Sysmon (Event 3 y 22) para correlación.</a:t>
+            </a:r>
+          </a:p>
+          <a:p>
+            <a:pPr>
+              <a:spcAft>
+                <a:spcPts val="600"/>
+              </a:spcAft>
+            </a:pPr>
+            <a:r>
+              <a:rPr sz="1500">
+                <a:solidFill>
+                  <a:srgbClr val="22282E"/>
+                </a:solidFill>
+              </a:rPr>
+              <a:t>•  Nunca dirijas C2 real contra sistemas ajenos; todo el tráfico se genera y captura en tu red de pruebas.</a:t>
             </a:r>
           </a:p>
         </p:txBody>
@@ -3347,7 +3367,7 @@
                   <a:srgbClr val="0B3D2E"/>
                 </a:solidFill>
               </a:rPr>
-              <a:t>❓ Preguntas frecuentes</a:t>
+              <a:t>🧪 Laboratorio guiado — Caza el latido del beacon</a:t>
             </a:r>
           </a:p>
         </p:txBody>
@@ -3385,82 +3405,97 @@
                   <a:srgbClr val="22282E"/>
                 </a:solidFill>
               </a:rPr>
-              <a:t>•  ❓ Si el C2 usa jitter, ¿es indetectable?</a:t>
-            </a:r>
-          </a:p>
-          <a:p>
-            <a:pPr>
-              <a:spcAft>
-                <a:spcPts val="600"/>
-              </a:spcAft>
-            </a:pPr>
-            <a:r>
-              <a:rPr sz="1500">
-                <a:solidFill>
-                  <a:srgbClr val="22282E"/>
-                </a:solidFill>
-              </a:rPr>
-              <a:t>•  No. El jitter dispersa el intervalo, pero un beacon sigue siendo mucho más regular que la navegación humana. El análisis estadístico sobre suficientes muestras lo revela.</a:t>
-            </a:r>
-          </a:p>
-          <a:p>
-            <a:pPr>
-              <a:spcAft>
-                <a:spcPts val="600"/>
-              </a:spcAft>
-            </a:pPr>
-            <a:r>
-              <a:rPr sz="1500">
-                <a:solidFill>
-                  <a:srgbClr val="22282E"/>
-                </a:solidFill>
-              </a:rPr>
-              <a:t>•  ❓ ¿Puedo detectar C2 cifrado?</a:t>
-            </a:r>
-          </a:p>
-          <a:p>
-            <a:pPr>
-              <a:spcAft>
-                <a:spcPts val="600"/>
-              </a:spcAft>
-            </a:pPr>
-            <a:r>
-              <a:rPr sz="1500">
-                <a:solidFill>
-                  <a:srgbClr val="22282E"/>
-                </a:solidFill>
-              </a:rPr>
-              <a:t>•  Sí, por metadatos: periodicidad, volumen, JA3, dominios y correlación con el proceso. No necesitas descifrar para reconocer el patrón de un implante.</a:t>
-            </a:r>
-          </a:p>
-          <a:p>
-            <a:pPr>
-              <a:spcAft>
-                <a:spcPts val="600"/>
-              </a:spcAft>
-            </a:pPr>
-            <a:r>
-              <a:rPr sz="1500">
-                <a:solidFill>
-                  <a:srgbClr val="22282E"/>
-                </a:solidFill>
-              </a:rPr>
-              <a:t>•  ❓ ¿Beaconing siempre es malicioso?</a:t>
-            </a:r>
-          </a:p>
-          <a:p>
-            <a:pPr>
-              <a:spcAft>
-                <a:spcPts val="600"/>
-              </a:spcAft>
-            </a:pPr>
-            <a:r>
-              <a:rPr sz="1500">
-                <a:solidFill>
-                  <a:srgbClr val="22282E"/>
-                </a:solidFill>
-              </a:rPr>
-              <a:t>•  No. Actualizaciones, telemetría y sincronización también "laten". Por eso se combina periodicidad con reputación de destino, volumen y contexto de endpoint antes de escalar.</a:t>
+              <a:t>•  Genera un beacon. En laboratorio, configura un implante benigno que se conecte a un servidor propio cada 60 s con un jitter del 20%.</a:t>
+            </a:r>
+          </a:p>
+          <a:p>
+            <a:pPr>
+              <a:spcAft>
+                <a:spcPts val="600"/>
+              </a:spcAft>
+            </a:pPr>
+            <a:r>
+              <a:rPr sz="1500">
+                <a:solidFill>
+                  <a:srgbClr val="22282E"/>
+                </a:solidFill>
+              </a:rPr>
+              <a:t>•  Captura con Zeek. Deja correr el tráfico varios minutos para acumular suficientes conexiones en conn.log.</a:t>
+            </a:r>
+          </a:p>
+          <a:p>
+            <a:pPr>
+              <a:spcAft>
+                <a:spcPts val="600"/>
+              </a:spcAft>
+            </a:pPr>
+            <a:r>
+              <a:rPr sz="1500">
+                <a:solidFill>
+                  <a:srgbClr val="22282E"/>
+                </a:solidFill>
+              </a:rPr>
+              <a:t>•  Analiza periodicidad. Con RITA, importa los logs y ejecuta el análisis de beaconing; observa el score y el intervalo estimado.</a:t>
+            </a:r>
+          </a:p>
+          <a:p>
+            <a:pPr>
+              <a:spcAft>
+                <a:spcPts val="600"/>
+              </a:spcAft>
+            </a:pPr>
+            <a:r>
+              <a:rPr sz="1500">
+                <a:solidFill>
+                  <a:srgbClr val="22282E"/>
+                </a:solidFill>
+              </a:rPr>
+              <a:t>•  Detección manual. En el SIEM, agrupa conexiones por par (origen, destino) y calcula la desviación de los deltas de tiempo: baja varianza = beacon.</a:t>
+            </a:r>
+          </a:p>
+          <a:p>
+            <a:pPr>
+              <a:spcAft>
+                <a:spcPts val="600"/>
+              </a:spcAft>
+            </a:pPr>
+            <a:r>
+              <a:rPr sz="1500">
+                <a:solidFill>
+                  <a:srgbClr val="22282E"/>
+                </a:solidFill>
+              </a:rPr>
+              <a:t>•  Prueba C2 sobre DNS. Configura el implante para usar DNS; detecta la alta cadencia de subdominios y respuestas TXT largas.</a:t>
+            </a:r>
+          </a:p>
+          <a:p>
+            <a:pPr>
+              <a:spcAft>
+                <a:spcPts val="600"/>
+              </a:spcAft>
+            </a:pPr>
+            <a:r>
+              <a:rPr sz="1500">
+                <a:solidFill>
+                  <a:srgbClr val="22282E"/>
+                </a:solidFill>
+              </a:rPr>
+              <a:t>•  Fingerprint TLS. Extrae el JA3 del cliente y compáralo con listas de frameworks conocidos.</a:t>
+            </a:r>
+          </a:p>
+          <a:p>
+            <a:pPr>
+              <a:spcAft>
+                <a:spcPts val="600"/>
+              </a:spcAft>
+            </a:pPr>
+            <a:r>
+              <a:rPr sz="1500">
+                <a:solidFill>
+                  <a:srgbClr val="22282E"/>
+                </a:solidFill>
+              </a:rPr>
+              <a:t>•  Correlaciona con endpoint. Enlaza la conexión periódica (Sysmon Event 3) con el proceso responsable y su árbol (clase 189).</a:t>
             </a:r>
           </a:p>
         </p:txBody>
@@ -3511,7 +3546,7 @@
                   <a:srgbClr val="0B3D2E"/>
                 </a:solidFill>
               </a:rPr>
-              <a:t>🔗 Referencias</a:t>
+              <a:t>✍️ Ejercicios</a:t>
             </a:r>
           </a:p>
         </p:txBody>
@@ -3549,71 +3584,712 @@
                   <a:srgbClr val="22282E"/>
                 </a:solidFill>
               </a:rPr>
-              <a:t>•  MITRE ATT&amp;CK, Command and Control — &lt;https://attack.mitre.org/tactics/TA0011/&gt;</a:t>
-            </a:r>
-          </a:p>
-          <a:p>
-            <a:pPr>
-              <a:spcAft>
-                <a:spcPts val="600"/>
-              </a:spcAft>
-            </a:pPr>
-            <a:r>
-              <a:rPr sz="1500">
-                <a:solidFill>
-                  <a:srgbClr val="22282E"/>
-                </a:solidFill>
-              </a:rPr>
-              <a:t>•  RITA — &lt;https://github.com/activecm/rita&gt;</a:t>
-            </a:r>
-          </a:p>
-          <a:p>
-            <a:pPr>
-              <a:spcAft>
-                <a:spcPts val="600"/>
-              </a:spcAft>
-            </a:pPr>
-            <a:r>
-              <a:rPr sz="1500">
-                <a:solidFill>
-                  <a:srgbClr val="22282E"/>
-                </a:solidFill>
-              </a:rPr>
-              <a:t>•  JA3 (Salesforce) — &lt;https://github.com/salesforce/ja3&gt;</a:t>
-            </a:r>
-          </a:p>
-          <a:p>
-            <a:pPr>
-              <a:spcAft>
-                <a:spcPts val="600"/>
-              </a:spcAft>
-            </a:pPr>
-            <a:r>
-              <a:rPr sz="1500">
-                <a:solidFill>
-                  <a:srgbClr val="22282E"/>
-                </a:solidFill>
-              </a:rPr>
-              <a:t>•  Sanders, C. y Smith, J. Applied Network Security Monitoring. Syngress.</a:t>
-            </a:r>
-          </a:p>
-          <a:p>
-            <a:pPr>
-              <a:spcAft>
-                <a:spcPts val="600"/>
-              </a:spcAft>
-            </a:pPr>
-            <a:r>
-              <a:rPr sz="1500">
-                <a:solidFill>
-                  <a:srgbClr val="22282E"/>
-                </a:solidFill>
-              </a:rPr>
-              <a:t>•  Active Countermeasures, "Detecting Beacons" (recursos formativos) — &lt;https://www.activecountermeasures.com/&gt;</a:t>
-            </a:r>
-          </a:p>
-        </p:txBody>
-      </p:sp>
+              <a:t>•  Explica cómo el jitter dificulta la detección y por qué no la impide.</a:t>
+            </a:r>
+          </a:p>
+          <a:p>
+            <a:pPr>
+              <a:spcAft>
+                <a:spcPts val="600"/>
+              </a:spcAft>
+            </a:pPr>
+            <a:r>
+              <a:rPr sz="1500">
+                <a:solidFill>
+                  <a:srgbClr val="22282E"/>
+                </a:solidFill>
+              </a:rPr>
+              <a:t>•  Calcula la varianza de intervalos de una serie de conexiones y decide si es beacon.</a:t>
+            </a:r>
+          </a:p>
+          <a:p>
+            <a:pPr>
+              <a:spcAft>
+                <a:spcPts val="600"/>
+              </a:spcAft>
+            </a:pPr>
+            <a:r>
+              <a:rPr sz="1500">
+                <a:solidFill>
+                  <a:srgbClr val="22282E"/>
+                </a:solidFill>
+              </a:rPr>
+              <a:t>•  Diseña una detección de C2 sobre DNS basada en cadencia y entropía.</a:t>
+            </a:r>
+          </a:p>
+          <a:p>
+            <a:pPr>
+              <a:spcAft>
+                <a:spcPts val="600"/>
+              </a:spcAft>
+            </a:pPr>
+            <a:r>
+              <a:rPr sz="1500">
+                <a:solidFill>
+                  <a:srgbClr val="22282E"/>
+                </a:solidFill>
+              </a:rPr>
+              <a:t>•  Describe cómo JA3 detecta un framework aun con TLS.</a:t>
+            </a:r>
+          </a:p>
+          <a:p>
+            <a:pPr>
+              <a:spcAft>
+                <a:spcPts val="600"/>
+              </a:spcAft>
+            </a:pPr>
+            <a:r>
+              <a:rPr sz="1500">
+                <a:solidFill>
+                  <a:srgbClr val="22282E"/>
+                </a:solidFill>
+              </a:rPr>
+              <a:t>•  Explica el domain fronting y cómo lo delatarían SNI vs Host header.</a:t>
+            </a:r>
+          </a:p>
+          <a:p>
+            <a:pPr>
+              <a:spcAft>
+                <a:spcPts val="600"/>
+              </a:spcAft>
+            </a:pPr>
+            <a:r>
+              <a:rPr sz="1500">
+                <a:solidFill>
+                  <a:srgbClr val="22282E"/>
+                </a:solidFill>
+              </a:rPr>
+              <a:t>•  Correlaciona un beacon de red con el proceso de endpoint que lo genera.</a:t>
+            </a:r>
+          </a:p>
+        </p:txBody>
+      </p:sp>
+    </p:spTree>
+  </p:cSld>
+  <p:clrMapOvr>
+    <a:masterClrMapping/>
+  </p:clrMapOvr>
+</p:sld>
+</file>
+
+<file path=ppt/slides/slide13.xml><?xml version="1.0" encoding="utf-8"?>
+<p:sld xmlns:a="http://schemas.openxmlformats.org/drawingml/2006/main" xmlns:p="http://schemas.openxmlformats.org/presentationml/2006/main" xmlns:r="http://schemas.openxmlformats.org/officeDocument/2006/relationships">
+  <p:cSld>
+    <p:spTree>
+      <p:nvGrpSpPr>
+        <p:cNvPr id="1" name=""/>
+        <p:cNvGrpSpPr/>
+        <p:nvPr/>
+      </p:nvGrpSpPr>
+      <p:grpSpPr/>
+      <p:sp>
+        <p:nvSpPr>
+          <p:cNvPr id="2" name="TextBox 1"/>
+          <p:cNvSpPr txBox="1"/>
+          <p:nvPr/>
+        </p:nvSpPr>
+        <p:spPr>
+          <a:xfrm>
+            <a:off x="457200" y="320040"/>
+            <a:ext cx="8229600" cy="822960"/>
+          </a:xfrm>
+          <a:prstGeom prst="rect">
+            <a:avLst/>
+          </a:prstGeom>
+          <a:noFill/>
+        </p:spPr>
+        <p:txBody>
+          <a:bodyPr wrap="square">
+            <a:spAutoFit/>
+          </a:bodyPr>
+          <a:lstStyle/>
+          <a:p>
+            <a:r>
+              <a:rPr sz="2600" b="1">
+                <a:solidFill>
+                  <a:srgbClr val="0B3D2E"/>
+                </a:solidFill>
+              </a:rPr>
+              <a:t>📝 Reto verificable</a:t>
+            </a:r>
+          </a:p>
+        </p:txBody>
+      </p:sp>
+      <p:sp>
+        <p:nvSpPr>
+          <p:cNvPr id="3" name="TextBox 2"/>
+          <p:cNvSpPr txBox="1"/>
+          <p:nvPr/>
+        </p:nvSpPr>
+        <p:spPr>
+          <a:xfrm>
+            <a:off x="457200" y="1280160"/>
+            <a:ext cx="8229600" cy="4937760"/>
+          </a:xfrm>
+          <a:prstGeom prst="rect">
+            <a:avLst/>
+          </a:prstGeom>
+          <a:noFill/>
+        </p:spPr>
+        <p:txBody>
+          <a:bodyPr wrap="square">
+            <a:spAutoFit/>
+          </a:bodyPr>
+          <a:lstStyle/>
+          <a:p>
+            <a:pPr>
+              <a:spcAft>
+                <a:spcPts val="600"/>
+              </a:spcAft>
+            </a:pPr>
+            <a:r>
+              <a:rPr sz="1500">
+                <a:solidFill>
+                  <a:srgbClr val="22282E"/>
+                </a:solidFill>
+              </a:rPr>
+              <a:t>•  Detecta un beacon generado en tu laboratorio combinando análisis temporal (periodicidad) y correlación con el proceso de endpoint. Criterio de aceptación: identificas el par origen-destino del beacon…</a:t>
+            </a:r>
+          </a:p>
+        </p:txBody>
+      </p:sp>
+    </p:spTree>
+  </p:cSld>
+  <p:clrMapOvr>
+    <a:masterClrMapping/>
+  </p:clrMapOvr>
+</p:sld>
+</file>
+
+<file path=ppt/slides/slide14.xml><?xml version="1.0" encoding="utf-8"?>
+<p:sld xmlns:a="http://schemas.openxmlformats.org/drawingml/2006/main" xmlns:p="http://schemas.openxmlformats.org/presentationml/2006/main" xmlns:r="http://schemas.openxmlformats.org/officeDocument/2006/relationships">
+  <p:cSld>
+    <p:spTree>
+      <p:nvGrpSpPr>
+        <p:cNvPr id="1" name=""/>
+        <p:cNvGrpSpPr/>
+        <p:nvPr/>
+      </p:nvGrpSpPr>
+      <p:grpSpPr/>
+      <p:sp>
+        <p:nvSpPr>
+          <p:cNvPr id="2" name="TextBox 1"/>
+          <p:cNvSpPr txBox="1"/>
+          <p:nvPr/>
+        </p:nvSpPr>
+        <p:spPr>
+          <a:xfrm>
+            <a:off x="457200" y="320040"/>
+            <a:ext cx="8229600" cy="822960"/>
+          </a:xfrm>
+          <a:prstGeom prst="rect">
+            <a:avLst/>
+          </a:prstGeom>
+          <a:noFill/>
+        </p:spPr>
+        <p:txBody>
+          <a:bodyPr wrap="square">
+            <a:spAutoFit/>
+          </a:bodyPr>
+          <a:lstStyle/>
+          <a:p>
+            <a:r>
+              <a:rPr sz="2600" b="1">
+                <a:solidFill>
+                  <a:srgbClr val="0B3D2E"/>
+                </a:solidFill>
+              </a:rPr>
+              <a:t>⚠️ Errores comunes</a:t>
+            </a:r>
+          </a:p>
+        </p:txBody>
+      </p:sp>
+      <p:sp>
+        <p:nvSpPr>
+          <p:cNvPr id="3" name="TextBox 2"/>
+          <p:cNvSpPr txBox="1"/>
+          <p:nvPr/>
+        </p:nvSpPr>
+        <p:spPr>
+          <a:xfrm>
+            <a:off x="457200" y="1280160"/>
+            <a:ext cx="8229600" cy="4937760"/>
+          </a:xfrm>
+          <a:prstGeom prst="rect">
+            <a:avLst/>
+          </a:prstGeom>
+          <a:noFill/>
+        </p:spPr>
+        <p:txBody>
+          <a:bodyPr wrap="square">
+            <a:spAutoFit/>
+          </a:bodyPr>
+          <a:lstStyle/>
+          <a:p>
+            <a:pPr>
+              <a:spcAft>
+                <a:spcPts val="600"/>
+              </a:spcAft>
+            </a:pPr>
+            <a:r>
+              <a:rPr sz="1500">
+                <a:solidFill>
+                  <a:srgbClr val="22282E"/>
+                </a:solidFill>
+              </a:rPr>
+              <a:t>•  Servicios legítimos marcan como beacon — Telemetría, updates y sync también son periódicos; añade allowlist</a:t>
+            </a:r>
+          </a:p>
+          <a:p>
+            <a:pPr>
+              <a:spcAft>
+                <a:spcPts val="600"/>
+              </a:spcAft>
+            </a:pPr>
+            <a:r>
+              <a:rPr sz="1500">
+                <a:solidFill>
+                  <a:srgbClr val="22282E"/>
+                </a:solidFill>
+              </a:rPr>
+              <a:t>•  Jitter alto evade tu regla — Umbral de varianza rígido; usa análisis estadístico (RITA) más tolerante</a:t>
+            </a:r>
+          </a:p>
+          <a:p>
+            <a:pPr>
+              <a:spcAft>
+                <a:spcPts val="600"/>
+              </a:spcAft>
+            </a:pPr>
+            <a:r>
+              <a:rPr sz="1500">
+                <a:solidFill>
+                  <a:srgbClr val="22282E"/>
+                </a:solidFill>
+              </a:rPr>
+              <a:t>•  No ves C2 sobre DNS — Falta logging DNS; captura con Zeek/Sysmon 22</a:t>
+            </a:r>
+          </a:p>
+          <a:p>
+            <a:pPr>
+              <a:spcAft>
+                <a:spcPts val="600"/>
+              </a:spcAft>
+            </a:pPr>
+            <a:r>
+              <a:rPr sz="1500">
+                <a:solidFill>
+                  <a:srgbClr val="22282E"/>
+                </a:solidFill>
+              </a:rPr>
+              <a:t>•  JA3 no identifica nada — Framework con perfil malleable; combina con periodicidad y volumen</a:t>
+            </a:r>
+          </a:p>
+          <a:p>
+            <a:pPr>
+              <a:spcAft>
+                <a:spcPts val="600"/>
+              </a:spcAft>
+            </a:pPr>
+            <a:r>
+              <a:rPr sz="1500">
+                <a:solidFill>
+                  <a:srgbClr val="22282E"/>
+                </a:solidFill>
+              </a:rPr>
+              <a:t>•  Falsos positivos de CDN — Malleable/domain fronting; correlaciona SNI vs Host y con endpoint</a:t>
+            </a:r>
+          </a:p>
+        </p:txBody>
+      </p:sp>
+    </p:spTree>
+  </p:cSld>
+  <p:clrMapOvr>
+    <a:masterClrMapping/>
+  </p:clrMapOvr>
+</p:sld>
+</file>
+
+<file path=ppt/slides/slide15.xml><?xml version="1.0" encoding="utf-8"?>
+<p:sld xmlns:a="http://schemas.openxmlformats.org/drawingml/2006/main" xmlns:p="http://schemas.openxmlformats.org/presentationml/2006/main" xmlns:r="http://schemas.openxmlformats.org/officeDocument/2006/relationships">
+  <p:cSld>
+    <p:spTree>
+      <p:nvGrpSpPr>
+        <p:cNvPr id="1" name=""/>
+        <p:cNvGrpSpPr/>
+        <p:nvPr/>
+      </p:nvGrpSpPr>
+      <p:grpSpPr/>
+      <p:sp>
+        <p:nvSpPr>
+          <p:cNvPr id="2" name="TextBox 1"/>
+          <p:cNvSpPr txBox="1"/>
+          <p:nvPr/>
+        </p:nvSpPr>
+        <p:spPr>
+          <a:xfrm>
+            <a:off x="457200" y="320040"/>
+            <a:ext cx="8229600" cy="822960"/>
+          </a:xfrm>
+          <a:prstGeom prst="rect">
+            <a:avLst/>
+          </a:prstGeom>
+          <a:noFill/>
+        </p:spPr>
+        <p:txBody>
+          <a:bodyPr wrap="square">
+            <a:spAutoFit/>
+          </a:bodyPr>
+          <a:lstStyle/>
+          <a:p>
+            <a:r>
+              <a:rPr sz="2600" b="1">
+                <a:solidFill>
+                  <a:srgbClr val="0B3D2E"/>
+                </a:solidFill>
+              </a:rPr>
+              <a:t>❓ Preguntas frecuentes</a:t>
+            </a:r>
+          </a:p>
+        </p:txBody>
+      </p:sp>
+      <p:sp>
+        <p:nvSpPr>
+          <p:cNvPr id="3" name="TextBox 2"/>
+          <p:cNvSpPr txBox="1"/>
+          <p:nvPr/>
+        </p:nvSpPr>
+        <p:spPr>
+          <a:xfrm>
+            <a:off x="457200" y="1280160"/>
+            <a:ext cx="8229600" cy="4937760"/>
+          </a:xfrm>
+          <a:prstGeom prst="rect">
+            <a:avLst/>
+          </a:prstGeom>
+          <a:noFill/>
+        </p:spPr>
+        <p:txBody>
+          <a:bodyPr wrap="square">
+            <a:spAutoFit/>
+          </a:bodyPr>
+          <a:lstStyle/>
+          <a:p>
+            <a:pPr>
+              <a:spcAft>
+                <a:spcPts val="600"/>
+              </a:spcAft>
+            </a:pPr>
+            <a:r>
+              <a:rPr sz="1500">
+                <a:solidFill>
+                  <a:srgbClr val="22282E"/>
+                </a:solidFill>
+              </a:rPr>
+              <a:t>•  ❓ Si el C2 usa jitter, ¿es indetectable?</a:t>
+            </a:r>
+          </a:p>
+          <a:p>
+            <a:pPr>
+              <a:spcAft>
+                <a:spcPts val="600"/>
+              </a:spcAft>
+            </a:pPr>
+            <a:r>
+              <a:rPr sz="1500">
+                <a:solidFill>
+                  <a:srgbClr val="22282E"/>
+                </a:solidFill>
+              </a:rPr>
+              <a:t>•  No. El jitter dispersa el intervalo, pero un beacon sigue siendo mucho más regular que la navegación humana. El análisis estadístico sobre suficientes muestras lo revela.</a:t>
+            </a:r>
+          </a:p>
+          <a:p>
+            <a:pPr>
+              <a:spcAft>
+                <a:spcPts val="600"/>
+              </a:spcAft>
+            </a:pPr>
+            <a:r>
+              <a:rPr sz="1500">
+                <a:solidFill>
+                  <a:srgbClr val="22282E"/>
+                </a:solidFill>
+              </a:rPr>
+              <a:t>•  ❓ ¿Puedo detectar C2 cifrado?</a:t>
+            </a:r>
+          </a:p>
+          <a:p>
+            <a:pPr>
+              <a:spcAft>
+                <a:spcPts val="600"/>
+              </a:spcAft>
+            </a:pPr>
+            <a:r>
+              <a:rPr sz="1500">
+                <a:solidFill>
+                  <a:srgbClr val="22282E"/>
+                </a:solidFill>
+              </a:rPr>
+              <a:t>•  Sí, por metadatos: periodicidad, volumen, JA3, dominios y correlación con el proceso. No necesitas descifrar para reconocer el patrón de un implante.</a:t>
+            </a:r>
+          </a:p>
+          <a:p>
+            <a:pPr>
+              <a:spcAft>
+                <a:spcPts val="600"/>
+              </a:spcAft>
+            </a:pPr>
+            <a:r>
+              <a:rPr sz="1500">
+                <a:solidFill>
+                  <a:srgbClr val="22282E"/>
+                </a:solidFill>
+              </a:rPr>
+              <a:t>•  ❓ ¿Beaconing siempre es malicioso?</a:t>
+            </a:r>
+          </a:p>
+          <a:p>
+            <a:pPr>
+              <a:spcAft>
+                <a:spcPts val="600"/>
+              </a:spcAft>
+            </a:pPr>
+            <a:r>
+              <a:rPr sz="1500">
+                <a:solidFill>
+                  <a:srgbClr val="22282E"/>
+                </a:solidFill>
+              </a:rPr>
+              <a:t>•  No. Actualizaciones, telemetría y sincronización también "laten". Por eso se combina periodicidad con reputación de destino, volumen y contexto de endpoint antes de escalar.</a:t>
+            </a:r>
+          </a:p>
+        </p:txBody>
+      </p:sp>
+    </p:spTree>
+  </p:cSld>
+  <p:clrMapOvr>
+    <a:masterClrMapping/>
+  </p:clrMapOvr>
+</p:sld>
+</file>
+
+<file path=ppt/slides/slide16.xml><?xml version="1.0" encoding="utf-8"?>
+<p:sld xmlns:a="http://schemas.openxmlformats.org/drawingml/2006/main" xmlns:p="http://schemas.openxmlformats.org/presentationml/2006/main" xmlns:r="http://schemas.openxmlformats.org/officeDocument/2006/relationships">
+  <p:cSld>
+    <p:spTree>
+      <p:nvGrpSpPr>
+        <p:cNvPr id="1" name=""/>
+        <p:cNvGrpSpPr/>
+        <p:nvPr/>
+      </p:nvGrpSpPr>
+      <p:grpSpPr/>
+      <p:sp>
+        <p:nvSpPr>
+          <p:cNvPr id="2" name="TextBox 1"/>
+          <p:cNvSpPr txBox="1"/>
+          <p:nvPr/>
+        </p:nvSpPr>
+        <p:spPr>
+          <a:xfrm>
+            <a:off x="457200" y="320040"/>
+            <a:ext cx="8229600" cy="822960"/>
+          </a:xfrm>
+          <a:prstGeom prst="rect">
+            <a:avLst/>
+          </a:prstGeom>
+          <a:noFill/>
+        </p:spPr>
+        <p:txBody>
+          <a:bodyPr wrap="square">
+            <a:spAutoFit/>
+          </a:bodyPr>
+          <a:lstStyle/>
+          <a:p>
+            <a:r>
+              <a:rPr sz="2600" b="1">
+                <a:solidFill>
+                  <a:srgbClr val="0B3D2E"/>
+                </a:solidFill>
+              </a:rPr>
+              <a:t>🔗 Referencias verificables y alcance</a:t>
+            </a:r>
+          </a:p>
+        </p:txBody>
+      </p:sp>
+      <p:sp>
+        <p:nvSpPr>
+          <p:cNvPr id="3" name="TextBox 2"/>
+          <p:cNvSpPr txBox="1"/>
+          <p:nvPr/>
+        </p:nvSpPr>
+        <p:spPr>
+          <a:xfrm>
+            <a:off x="457200" y="1280160"/>
+            <a:ext cx="8229600" cy="4937760"/>
+          </a:xfrm>
+          <a:prstGeom prst="rect">
+            <a:avLst/>
+          </a:prstGeom>
+          <a:noFill/>
+        </p:spPr>
+        <p:txBody>
+          <a:bodyPr wrap="square">
+            <a:spAutoFit/>
+          </a:bodyPr>
+          <a:lstStyle/>
+          <a:p>
+            <a:pPr>
+              <a:spcAft>
+                <a:spcPts val="600"/>
+              </a:spcAft>
+            </a:pPr>
+            <a:r>
+              <a:rPr sz="1500">
+                <a:solidFill>
+                  <a:srgbClr val="22282E"/>
+                </a:solidFill>
+              </a:rPr>
+              <a:t>•  MITRE ATT&amp;CK, Command and Control: fuente primaria para el objetivo táctico y los procedimientos documentados — &lt;https://attack.mitre.org/tactics/TA0011/&gt;</a:t>
+            </a:r>
+          </a:p>
+          <a:p>
+            <a:pPr>
+              <a:spcAft>
+                <a:spcPts val="600"/>
+              </a:spcAft>
+            </a:pPr>
+            <a:r>
+              <a:rPr sz="1500">
+                <a:solidFill>
+                  <a:srgbClr val="22282E"/>
+                </a:solidFill>
+              </a:rPr>
+              <a:t>•  MITRE ATT&amp;CK T1071: fuente primaria para protocolos de capa de aplicación utilizados por procedimientos de C2; el uso de HTTP o DNS también puede ser legítimo —…</a:t>
+            </a:r>
+          </a:p>
+          <a:p>
+            <a:pPr>
+              <a:spcAft>
+                <a:spcPts val="600"/>
+              </a:spcAft>
+            </a:pPr>
+            <a:r>
+              <a:rPr sz="1500">
+                <a:solidFill>
+                  <a:srgbClr val="22282E"/>
+                </a:solidFill>
+              </a:rPr>
+              <a:t>•  RITA: repositorio del proyecto y sus analíticas de metadatos; una puntuación de beaconing es una señal para investigar, no una atribución — &lt;https://github.com/activecm/rita&gt;</a:t>
+            </a:r>
+          </a:p>
+          <a:p>
+            <a:pPr>
+              <a:spcAft>
+                <a:spcPts val="600"/>
+              </a:spcAft>
+            </a:pPr>
+            <a:r>
+              <a:rPr sz="1500">
+                <a:solidFill>
+                  <a:srgbClr val="22282E"/>
+                </a:solidFill>
+              </a:rPr>
+              <a:t>•  JA3: repositorio original del método de huella TLS; documenta el cálculo, pero no convierte una coincidencia en veredicto — &lt;https://github.com/salesforce/ja3&gt;</a:t>
+            </a:r>
+          </a:p>
+          <a:p>
+            <a:pPr>
+              <a:spcAft>
+                <a:spcPts val="600"/>
+              </a:spcAft>
+            </a:pPr>
+            <a:r>
+              <a:rPr sz="1500">
+                <a:solidFill>
+                  <a:srgbClr val="22282E"/>
+                </a:solidFill>
+              </a:rPr>
+              <a:t>•  Sanders, C. y Smith, J. Applied Network Security Monitoring. Syngress: bibliografía complementaria para razonar con metadatos de red.</a:t>
+            </a:r>
+          </a:p>
+        </p:txBody>
+      </p:sp>
+    </p:spTree>
+  </p:cSld>
+  <p:clrMapOvr>
+    <a:masterClrMapping/>
+  </p:clrMapOvr>
+</p:sld>
+</file>
+
+<file path=ppt/slides/slide17.xml><?xml version="1.0" encoding="utf-8"?>
+<p:sld xmlns:a="http://schemas.openxmlformats.org/drawingml/2006/main" xmlns:p="http://schemas.openxmlformats.org/presentationml/2006/main" xmlns:r="http://schemas.openxmlformats.org/officeDocument/2006/relationships">
+  <p:cSld>
+    <p:spTree>
+      <p:nvGrpSpPr>
+        <p:cNvPr id="1" name=""/>
+        <p:cNvGrpSpPr/>
+        <p:nvPr/>
+      </p:nvGrpSpPr>
+      <p:grpSpPr/>
+      <p:sp>
+        <p:nvSpPr>
+          <p:cNvPr id="2" name="TextBox 1"/>
+          <p:cNvSpPr txBox="1"/>
+          <p:nvPr/>
+        </p:nvSpPr>
+        <p:spPr>
+          <a:xfrm>
+            <a:off x="457200" y="274320"/>
+            <a:ext cx="8229600" cy="640080"/>
+          </a:xfrm>
+          <a:prstGeom prst="rect">
+            <a:avLst/>
+          </a:prstGeom>
+          <a:noFill/>
+        </p:spPr>
+        <p:txBody>
+          <a:bodyPr wrap="square">
+            <a:spAutoFit/>
+          </a:bodyPr>
+          <a:lstStyle/>
+          <a:p>
+            <a:r>
+              <a:rPr sz="2200" b="1">
+                <a:solidFill>
+                  <a:srgbClr val="0B3D2E"/>
+                </a:solidFill>
+              </a:rPr>
+              <a:t>Diagrama de la clase</a:t>
+            </a:r>
+          </a:p>
+        </p:txBody>
+      </p:sp>
+      <p:pic>
+        <p:nvPicPr>
+          <p:cNvPr id="3" name="Picture 2" descr="2d799f4fa1badf43.png"/>
+          <p:cNvPicPr>
+            <a:picLocks noChangeAspect="1"/>
+          </p:cNvPicPr>
+          <p:nvPr/>
+        </p:nvPicPr>
+        <p:blipFill>
+          <a:blip r:embed="rId2"/>
+          <a:stretch>
+            <a:fillRect/>
+          </a:stretch>
+        </p:blipFill>
+        <p:spPr>
+          <a:xfrm>
+            <a:off x="457200" y="2510028"/>
+            <a:ext cx="8229600" cy="2478024"/>
+          </a:xfrm>
+          <a:prstGeom prst="rect">
+            <a:avLst/>
+          </a:prstGeom>
+        </p:spPr>
+      </p:pic>
     </p:spTree>
   </p:cSld>
   <p:clrMapOvr>
@@ -3698,7 +4374,7 @@
                   <a:srgbClr val="22282E"/>
                 </a:solidFill>
               </a:rPr>
-              <a:t>•  Detectar canales de mando y control (C2) y su patrón de beaconing: las llamadas periódicas que un implante hace a su servidor. Aprenderás a reconocer regularidad temporal, jitter, dominios y fingerprints de frameworks como Cobalt Strike, y a cazar C2 sobre HTTP/S, DNS y protocolos comunes usando telemetría de red y endpoint.</a:t>
+              <a:t>•  Detectar canales de mando y control (C2) y su patrón de beaconing: las llamadas periódicas que un implante hace a su servidor. Aprenderás a reconocer regularidad temporal, jitter, dominios y…</a:t>
             </a:r>
           </a:p>
         </p:txBody>
@@ -4092,7 +4768,7 @@
                   <a:srgbClr val="0B3D2E"/>
                 </a:solidFill>
               </a:rPr>
-              <a:t>📖 Definiciones y características</a:t>
+              <a:t>🧠 Explicación en profundidad</a:t>
             </a:r>
           </a:p>
         </p:txBody>
@@ -4130,97 +4806,97 @@
                   <a:srgbClr val="22282E"/>
                 </a:solidFill>
               </a:rPr>
-              <a:t>•  C2 (Command and Control): infraestructura desde la que el atacante controla los hosts comprometidos. Característica: prioriza sigilo y persistencia del canal.</a:t>
-            </a:r>
-          </a:p>
-          <a:p>
-            <a:pPr>
-              <a:spcAft>
-                <a:spcPts val="600"/>
-              </a:spcAft>
-            </a:pPr>
-            <a:r>
-              <a:rPr sz="1500">
-                <a:solidFill>
-                  <a:srgbClr val="22282E"/>
-                </a:solidFill>
-              </a:rPr>
-              <a:t>•  Beacon: implante que "llama a casa" periódicamente esperando órdenes. Característica: conexiones regulares de bajo volumen.</a:t>
-            </a:r>
-          </a:p>
-          <a:p>
-            <a:pPr>
-              <a:spcAft>
-                <a:spcPts val="600"/>
-              </a:spcAft>
-            </a:pPr>
-            <a:r>
-              <a:rPr sz="1500">
-                <a:solidFill>
-                  <a:srgbClr val="22282E"/>
-                </a:solidFill>
-              </a:rPr>
-              <a:t>•  Jitter: variación aleatoria del intervalo de beacon para evitar detección. Característica: dispersa la periodicidad, pero rara vez la elimina del todo.</a:t>
-            </a:r>
-          </a:p>
-          <a:p>
-            <a:pPr>
-              <a:spcAft>
-                <a:spcPts val="600"/>
-              </a:spcAft>
-            </a:pPr>
-            <a:r>
-              <a:rPr sz="1500">
-                <a:solidFill>
-                  <a:srgbClr val="22282E"/>
-                </a:solidFill>
-              </a:rPr>
-              <a:t>•  Malleable C2: perfiles que hacen que el tráfico imite servicios legítimos (jQuery, CDN). Característica: engaña inspecciones superficiales.</a:t>
-            </a:r>
-          </a:p>
-          <a:p>
-            <a:pPr>
-              <a:spcAft>
-                <a:spcPts val="600"/>
-              </a:spcAft>
-            </a:pPr>
-            <a:r>
-              <a:rPr sz="1500">
-                <a:solidFill>
-                  <a:srgbClr val="22282E"/>
-                </a:solidFill>
-              </a:rPr>
-              <a:t>•  JA3/JA3S: fingerprint del handshake TLS. Característica: algunos frameworks tienen JA3 característicos, detectables aun con cifrado.</a:t>
-            </a:r>
-          </a:p>
-          <a:p>
-            <a:pPr>
-              <a:spcAft>
-                <a:spcPts val="600"/>
-              </a:spcAft>
-            </a:pPr>
-            <a:r>
-              <a:rPr sz="1500">
-                <a:solidFill>
-                  <a:srgbClr val="22282E"/>
-                </a:solidFill>
-              </a:rPr>
-              <a:t>•  DNS C2: órdenes/datos codificados en consultas y respuestas DNS. Característica: alta cadencia de subdominios y registros TXT inusuales.</a:t>
-            </a:r>
-          </a:p>
-          <a:p>
-            <a:pPr>
-              <a:spcAft>
-                <a:spcPts val="600"/>
-              </a:spcAft>
-            </a:pPr>
-            <a:r>
-              <a:rPr sz="1500">
-                <a:solidFill>
-                  <a:srgbClr val="22282E"/>
-                </a:solidFill>
-              </a:rPr>
-              <a:t>•  Domain fronting: ocultar el destino real tras un dominio de CDN legítimo. Característica: SNI benigno con Host header distinto.</a:t>
+              <a:t>•  El mando y control permite que una intrusión reciba instrucciones o envíe resultados. Un beacon periódico es solo una forma: puede usar jitter, permanecer inactivo, ocultarse en servicios compartidos…</a:t>
+            </a:r>
+          </a:p>
+          <a:p>
+            <a:pPr>
+              <a:spcAft>
+                <a:spcPts val="600"/>
+              </a:spcAft>
+            </a:pPr>
+            <a:r>
+              <a:rPr sz="1500">
+                <a:solidFill>
+                  <a:srgbClr val="22282E"/>
+                </a:solidFill>
+              </a:rPr>
+              <a:t>•  Se combinan regularidad, duración, asimetría de bytes, destino novedoso, rareza organizacional y proceso. Entropía de dominio o huella TLS no prueban C2: CDN, actualizadores y software empresarial…</a:t>
+            </a:r>
+          </a:p>
+          <a:p>
+            <a:pPr>
+              <a:spcAft>
+                <a:spcPts val="600"/>
+              </a:spcAft>
+            </a:pPr>
+            <a:r>
+              <a:rPr sz="1500">
+                <a:solidFill>
+                  <a:srgbClr val="22282E"/>
+                </a:solidFill>
+              </a:rPr>
+              <a:t>•  Un beacon simple contacta cada intervalo. Se ordenan tiempos por entidad y destino, se calculan diferencias y se observa dispersión. Jitter ensancha esa distribución; por ello no se exige igualdad…</a:t>
+            </a:r>
+          </a:p>
+          <a:p>
+            <a:pPr>
+              <a:spcAft>
+                <a:spcPts val="600"/>
+              </a:spcAft>
+            </a:pPr>
+            <a:r>
+              <a:rPr sz="1500">
+                <a:solidFill>
+                  <a:srgbClr val="22282E"/>
+                </a:solidFill>
+              </a:rPr>
+              <a:t>•  El tráfico interactivo rompe periodicidad y puede aumentar bytes. Algunos canales usan long polling, servicios cloud o DNS; otros cambian dominios. La detección no debe depender de una única forma.…</a:t>
+            </a:r>
+          </a:p>
+          <a:p>
+            <a:pPr>
+              <a:spcAft>
+                <a:spcPts val="600"/>
+              </a:spcAft>
+            </a:pPr>
+            <a:r>
+              <a:rPr sz="1500">
+                <a:solidFill>
+                  <a:srgbClr val="22282E"/>
+                </a:solidFill>
+              </a:rPr>
+              <a:t>•  Una estación que consulta un dominio nuevo y establece TLS cada pocos minutos es un candidato. Si el EDR muestra que la conexión pertenece al navegador iniciado por el usuario, la explicación cambia…</a:t>
+            </a:r>
+          </a:p>
+          <a:p>
+            <a:pPr>
+              <a:spcAft>
+                <a:spcPts val="600"/>
+              </a:spcAft>
+            </a:pPr>
+            <a:r>
+              <a:rPr sz="1500">
+                <a:solidFill>
+                  <a:srgbClr val="22282E"/>
+                </a:solidFill>
+              </a:rPr>
+              <a:t>•  Bytes asimétricos no equivalen a exfiltración: un heartbeat suele enviar poco y recibir poco; una descarga legítima recibe mucho. Se estudian dirección, secuencia y rol del sistema. La reputación…</a:t>
+            </a:r>
+          </a:p>
+          <a:p>
+            <a:pPr>
+              <a:spcAft>
+                <a:spcPts val="600"/>
+              </a:spcAft>
+            </a:pPr>
+            <a:r>
+              <a:rPr sz="1500">
+                <a:solidFill>
+                  <a:srgbClr val="22282E"/>
+                </a:solidFill>
+              </a:rPr>
+              <a:t>•  JA3 y otras huellas describen características observadas del cliente, no identidad estable del malware. Bibliotecas compartidas, cambios de TLS y evasión reducen su duración. La entropía de nombres…</a:t>
             </a:r>
           </a:p>
         </p:txBody>
@@ -4271,7 +4947,7 @@
                   <a:srgbClr val="0B3D2E"/>
                 </a:solidFill>
               </a:rPr>
-              <a:t>🧰 Herramientas y preparación</a:t>
+              <a:t>📔 Glosario</a:t>
             </a:r>
           </a:p>
         </p:txBody>
@@ -4309,82 +4985,97 @@
                   <a:srgbClr val="22282E"/>
                 </a:solidFill>
               </a:rPr>
-              <a:t>•  En laboratorio aislado:</a:t>
-            </a:r>
-          </a:p>
-          <a:p>
-            <a:pPr>
-              <a:spcAft>
-                <a:spcPts val="600"/>
-              </a:spcAft>
-            </a:pPr>
-            <a:r>
-              <a:rPr sz="1500">
-                <a:solidFill>
-                  <a:srgbClr val="22282E"/>
-                </a:solidFill>
-              </a:rPr>
-              <a:t>•  Zeek (conn/dns/ssl.log) y Suricata como fuentes de red.</a:t>
-            </a:r>
-          </a:p>
-          <a:p>
-            <a:pPr>
-              <a:spcAft>
-                <a:spcPts val="600"/>
-              </a:spcAft>
-            </a:pPr>
-            <a:r>
-              <a:rPr sz="1500">
-                <a:solidFill>
-                  <a:srgbClr val="22282E"/>
-                </a:solidFill>
-              </a:rPr>
-              <a:t>•  RITA para análisis de beaconing y DNS tunneling sobre logs de Zeek.</a:t>
-            </a:r>
-          </a:p>
-          <a:p>
-            <a:pPr>
-              <a:spcAft>
-                <a:spcPts val="600"/>
-              </a:spcAft>
-            </a:pPr>
-            <a:r>
-              <a:rPr sz="1500">
-                <a:solidFill>
-                  <a:srgbClr val="22282E"/>
-                </a:solidFill>
-              </a:rPr>
-              <a:t>•  Un framework C2 de laboratorio para generar tráfico de prueba (p. ej. un teamserver propio o un simulador de beacon benigno).</a:t>
-            </a:r>
-          </a:p>
-          <a:p>
-            <a:pPr>
-              <a:spcAft>
-                <a:spcPts val="600"/>
-              </a:spcAft>
-            </a:pPr>
-            <a:r>
-              <a:rPr sz="1500">
-                <a:solidFill>
-                  <a:srgbClr val="22282E"/>
-                </a:solidFill>
-              </a:rPr>
-              <a:t>•  Tu SIEM y la telemetría Sysmon (Event 3 y 22) para correlación.</a:t>
-            </a:r>
-          </a:p>
-          <a:p>
-            <a:pPr>
-              <a:spcAft>
-                <a:spcPts val="600"/>
-              </a:spcAft>
-            </a:pPr>
-            <a:r>
-              <a:rPr sz="1500">
-                <a:solidFill>
-                  <a:srgbClr val="22282E"/>
-                </a:solidFill>
-              </a:rPr>
-              <a:t>•  Nunca dirijas C2 real contra sistemas ajenos; todo el tráfico se genera y captura en tu red de pruebas.</a:t>
+              <a:t>•  C2: canal para controlar un implante.</a:t>
+            </a:r>
+          </a:p>
+          <a:p>
+            <a:pPr>
+              <a:spcAft>
+                <a:spcPts val="600"/>
+              </a:spcAft>
+            </a:pPr>
+            <a:r>
+              <a:rPr sz="1500">
+                <a:solidFill>
+                  <a:srgbClr val="22282E"/>
+                </a:solidFill>
+              </a:rPr>
+              <a:t>•  Beacon: comunicación recurrente de disponibilidad.</a:t>
+            </a:r>
+          </a:p>
+          <a:p>
+            <a:pPr>
+              <a:spcAft>
+                <a:spcPts val="600"/>
+              </a:spcAft>
+            </a:pPr>
+            <a:r>
+              <a:rPr sz="1500">
+                <a:solidFill>
+                  <a:srgbClr val="22282E"/>
+                </a:solidFill>
+              </a:rPr>
+              <a:t>•  Jitter: variación del intervalo.</a:t>
+            </a:r>
+          </a:p>
+          <a:p>
+            <a:pPr>
+              <a:spcAft>
+                <a:spcPts val="600"/>
+              </a:spcAft>
+            </a:pPr>
+            <a:r>
+              <a:rPr sz="1500">
+                <a:solidFill>
+                  <a:srgbClr val="22282E"/>
+                </a:solidFill>
+              </a:rPr>
+              <a:t>•  Periodicidad: repetición temporal medible.</a:t>
+            </a:r>
+          </a:p>
+          <a:p>
+            <a:pPr>
+              <a:spcAft>
+                <a:spcPts val="600"/>
+              </a:spcAft>
+            </a:pPr>
+            <a:r>
+              <a:rPr sz="1500">
+                <a:solidFill>
+                  <a:srgbClr val="22282E"/>
+                </a:solidFill>
+              </a:rPr>
+              <a:t>•  Asimetría de bytes: diferencia entre subida y bajada.</a:t>
+            </a:r>
+          </a:p>
+          <a:p>
+            <a:pPr>
+              <a:spcAft>
+                <a:spcPts val="600"/>
+              </a:spcAft>
+            </a:pPr>
+            <a:r>
+              <a:rPr sz="1500">
+                <a:solidFill>
+                  <a:srgbClr val="22282E"/>
+                </a:solidFill>
+              </a:rPr>
+              <a:t>•  Destino novedoso: contraparte sin historia suficiente.</a:t>
+            </a:r>
+          </a:p>
+          <a:p>
+            <a:pPr>
+              <a:spcAft>
+                <a:spcPts val="600"/>
+              </a:spcAft>
+            </a:pPr>
+            <a:r>
+              <a:rPr sz="1500">
+                <a:solidFill>
+                  <a:srgbClr val="22282E"/>
+                </a:solidFill>
+              </a:rPr>
+              <a:t>•  DGA: algoritmo que genera dominios.</a:t>
             </a:r>
           </a:p>
         </p:txBody>
@@ -4435,7 +5126,7 @@
                   <a:srgbClr val="0B3D2E"/>
                 </a:solidFill>
               </a:rPr>
-              <a:t>🧪 Laboratorio guiado — Caza el latido del beacon</a:t>
+              <a:t>📖 Definiciones y características</a:t>
             </a:r>
           </a:p>
         </p:txBody>
@@ -4473,97 +5164,97 @@
                   <a:srgbClr val="22282E"/>
                 </a:solidFill>
               </a:rPr>
-              <a:t>•  Genera un beacon. En laboratorio, configura un implante benigno que se conecte a un servidor propio cada 60 s con un jitter del 20%.</a:t>
-            </a:r>
-          </a:p>
-          <a:p>
-            <a:pPr>
-              <a:spcAft>
-                <a:spcPts val="600"/>
-              </a:spcAft>
-            </a:pPr>
-            <a:r>
-              <a:rPr sz="1500">
-                <a:solidFill>
-                  <a:srgbClr val="22282E"/>
-                </a:solidFill>
-              </a:rPr>
-              <a:t>•  Captura con Zeek. Deja correr el tráfico varios minutos para acumular suficientes conexiones en conn.log.</a:t>
-            </a:r>
-          </a:p>
-          <a:p>
-            <a:pPr>
-              <a:spcAft>
-                <a:spcPts val="600"/>
-              </a:spcAft>
-            </a:pPr>
-            <a:r>
-              <a:rPr sz="1500">
-                <a:solidFill>
-                  <a:srgbClr val="22282E"/>
-                </a:solidFill>
-              </a:rPr>
-              <a:t>•  Analiza periodicidad. Con RITA, importa los logs y ejecuta el análisis de beaconing; observa el score y el intervalo estimado.</a:t>
-            </a:r>
-          </a:p>
-          <a:p>
-            <a:pPr>
-              <a:spcAft>
-                <a:spcPts val="600"/>
-              </a:spcAft>
-            </a:pPr>
-            <a:r>
-              <a:rPr sz="1500">
-                <a:solidFill>
-                  <a:srgbClr val="22282E"/>
-                </a:solidFill>
-              </a:rPr>
-              <a:t>•  Detección manual. En el SIEM, agrupa conexiones por par (origen, destino) y calcula la desviación de los deltas de tiempo: baja varianza = beacon.</a:t>
-            </a:r>
-          </a:p>
-          <a:p>
-            <a:pPr>
-              <a:spcAft>
-                <a:spcPts val="600"/>
-              </a:spcAft>
-            </a:pPr>
-            <a:r>
-              <a:rPr sz="1500">
-                <a:solidFill>
-                  <a:srgbClr val="22282E"/>
-                </a:solidFill>
-              </a:rPr>
-              <a:t>•  Prueba C2 sobre DNS. Configura el implante para usar DNS; detecta la alta cadencia de subdominios y respuestas TXT largas.</a:t>
-            </a:r>
-          </a:p>
-          <a:p>
-            <a:pPr>
-              <a:spcAft>
-                <a:spcPts val="600"/>
-              </a:spcAft>
-            </a:pPr>
-            <a:r>
-              <a:rPr sz="1500">
-                <a:solidFill>
-                  <a:srgbClr val="22282E"/>
-                </a:solidFill>
-              </a:rPr>
-              <a:t>•  Fingerprint TLS. Extrae el JA3 del cliente y compáralo con listas de frameworks conocidos.</a:t>
-            </a:r>
-          </a:p>
-          <a:p>
-            <a:pPr>
-              <a:spcAft>
-                <a:spcPts val="600"/>
-              </a:spcAft>
-            </a:pPr>
-            <a:r>
-              <a:rPr sz="1500">
-                <a:solidFill>
-                  <a:srgbClr val="22282E"/>
-                </a:solidFill>
-              </a:rPr>
-              <a:t>•  Correlaciona con endpoint. Enlaza la conexión periódica (Sysmon Event 3) con el proceso responsable y su árbol (clase 189).</a:t>
+              <a:t>•  C2 (Command and Control): infraestructura desde la que el atacante controla los hosts comprometidos. Característica: prioriza sigilo y persistencia del canal.</a:t>
+            </a:r>
+          </a:p>
+          <a:p>
+            <a:pPr>
+              <a:spcAft>
+                <a:spcPts val="600"/>
+              </a:spcAft>
+            </a:pPr>
+            <a:r>
+              <a:rPr sz="1500">
+                <a:solidFill>
+                  <a:srgbClr val="22282E"/>
+                </a:solidFill>
+              </a:rPr>
+              <a:t>•  Beacon: implante que "llama a casa" periódicamente esperando órdenes. Característica: conexiones regulares de bajo volumen.</a:t>
+            </a:r>
+          </a:p>
+          <a:p>
+            <a:pPr>
+              <a:spcAft>
+                <a:spcPts val="600"/>
+              </a:spcAft>
+            </a:pPr>
+            <a:r>
+              <a:rPr sz="1500">
+                <a:solidFill>
+                  <a:srgbClr val="22282E"/>
+                </a:solidFill>
+              </a:rPr>
+              <a:t>•  Jitter: variación aleatoria del intervalo de beacon para evitar detección. Característica: dispersa la periodicidad, pero rara vez la elimina del todo.</a:t>
+            </a:r>
+          </a:p>
+          <a:p>
+            <a:pPr>
+              <a:spcAft>
+                <a:spcPts val="600"/>
+              </a:spcAft>
+            </a:pPr>
+            <a:r>
+              <a:rPr sz="1500">
+                <a:solidFill>
+                  <a:srgbClr val="22282E"/>
+                </a:solidFill>
+              </a:rPr>
+              <a:t>•  Malleable C2: perfiles que hacen que el tráfico imite servicios legítimos (jQuery, CDN). Característica: engaña inspecciones superficiales.</a:t>
+            </a:r>
+          </a:p>
+          <a:p>
+            <a:pPr>
+              <a:spcAft>
+                <a:spcPts val="600"/>
+              </a:spcAft>
+            </a:pPr>
+            <a:r>
+              <a:rPr sz="1500">
+                <a:solidFill>
+                  <a:srgbClr val="22282E"/>
+                </a:solidFill>
+              </a:rPr>
+              <a:t>•  JA3/JA3S: fingerprint del handshake TLS. Característica: algunos frameworks tienen JA3 característicos, detectables aun con cifrado.</a:t>
+            </a:r>
+          </a:p>
+          <a:p>
+            <a:pPr>
+              <a:spcAft>
+                <a:spcPts val="600"/>
+              </a:spcAft>
+            </a:pPr>
+            <a:r>
+              <a:rPr sz="1500">
+                <a:solidFill>
+                  <a:srgbClr val="22282E"/>
+                </a:solidFill>
+              </a:rPr>
+              <a:t>•  DNS C2: órdenes/datos codificados en consultas y respuestas DNS. Característica: alta cadencia de subdominios y registros TXT inusuales.</a:t>
+            </a:r>
+          </a:p>
+          <a:p>
+            <a:pPr>
+              <a:spcAft>
+                <a:spcPts val="600"/>
+              </a:spcAft>
+            </a:pPr>
+            <a:r>
+              <a:rPr sz="1500">
+                <a:solidFill>
+                  <a:srgbClr val="22282E"/>
+                </a:solidFill>
+              </a:rPr>
+              <a:t>•  Domain fronting: ocultar el destino real tras un dominio de CDN legítimo. Característica: SNI benigno con Host header distinto.</a:t>
             </a:r>
           </a:p>
         </p:txBody>
@@ -4614,7 +5305,7 @@
                   <a:srgbClr val="0B3D2E"/>
                 </a:solidFill>
               </a:rPr>
-              <a:t>✍️ Ejercicios</a:t>
+              <a:t>🔍 Análisis resuelto — periodicidad con jitter</a:t>
             </a:r>
           </a:p>
         </p:txBody>
@@ -4652,82 +5343,37 @@
                   <a:srgbClr val="22282E"/>
                 </a:solidFill>
               </a:rPr>
-              <a:t>•  Explica cómo el jitter dificulta la detección y por qué no la impide.</a:t>
-            </a:r>
-          </a:p>
-          <a:p>
-            <a:pPr>
-              <a:spcAft>
-                <a:spcPts val="600"/>
-              </a:spcAft>
-            </a:pPr>
-            <a:r>
-              <a:rPr sz="1500">
-                <a:solidFill>
-                  <a:srgbClr val="22282E"/>
-                </a:solidFill>
-              </a:rPr>
-              <a:t>•  Calcula la varianza de intervalos de una serie de conexiones y decide si es beacon.</a:t>
-            </a:r>
-          </a:p>
-          <a:p>
-            <a:pPr>
-              <a:spcAft>
-                <a:spcPts val="600"/>
-              </a:spcAft>
-            </a:pPr>
-            <a:r>
-              <a:rPr sz="1500">
-                <a:solidFill>
-                  <a:srgbClr val="22282E"/>
-                </a:solidFill>
-              </a:rPr>
-              <a:t>•  Diseña una detección de C2 sobre DNS basada en cadencia y entropía.</a:t>
-            </a:r>
-          </a:p>
-          <a:p>
-            <a:pPr>
-              <a:spcAft>
-                <a:spcPts val="600"/>
-              </a:spcAft>
-            </a:pPr>
-            <a:r>
-              <a:rPr sz="1500">
-                <a:solidFill>
-                  <a:srgbClr val="22282E"/>
-                </a:solidFill>
-              </a:rPr>
-              <a:t>•  Describe cómo JA3 detecta un framework aun con TLS.</a:t>
-            </a:r>
-          </a:p>
-          <a:p>
-            <a:pPr>
-              <a:spcAft>
-                <a:spcPts val="600"/>
-              </a:spcAft>
-            </a:pPr>
-            <a:r>
-              <a:rPr sz="1500">
-                <a:solidFill>
-                  <a:srgbClr val="22282E"/>
-                </a:solidFill>
-              </a:rPr>
-              <a:t>•  Explica el domain fronting y cómo lo delatarían SNI vs Host header.</a:t>
-            </a:r>
-          </a:p>
-          <a:p>
-            <a:pPr>
-              <a:spcAft>
-                <a:spcPts val="600"/>
-              </a:spcAft>
-            </a:pPr>
-            <a:r>
-              <a:rPr sz="1500">
-                <a:solidFill>
-                  <a:srgbClr val="22282E"/>
-                </a:solidFill>
-              </a:rPr>
-              <a:t>•  Correlaciona un beacon de red con el proceso de endpoint que lo genera.</a:t>
+              <a:t>•  Para un host se agrupan conexiones por destino y se ordenan tiempos. Un candidato presenta intervalos cercanos a cinco minutos, con variación de ±20 %. Se calculan mediana y dispersión; no se exige…</a:t>
+            </a:r>
+          </a:p>
+          <a:p>
+            <a:pPr>
+              <a:spcAft>
+                <a:spcPts val="600"/>
+              </a:spcAft>
+            </a:pPr>
+            <a:r>
+              <a:rPr sz="1500">
+                <a:solidFill>
+                  <a:srgbClr val="22282E"/>
+                </a:solidFill>
+              </a:rPr>
+              <a:t>•  Antes de clasificar, se compara con inventario: los agentes de monitoreo tienen periodicidad semejante. El endpoint muestra que el candidato pertenece a un ejecutable en ruta temporal cuyo padre fue…</a:t>
+            </a:r>
+          </a:p>
+          <a:p>
+            <a:pPr>
+              <a:spcAft>
+                <a:spcPts val="600"/>
+              </a:spcAft>
+            </a:pPr>
+            <a:r>
+              <a:rPr sz="1500">
+                <a:solidFill>
+                  <a:srgbClr val="22282E"/>
+                </a:solidFill>
+              </a:rPr>
+              <a:t>•  Una segunda ventana muestra actividad interactiva que rompe el patrón. La detección basada solo en periodicidad la perdería, por lo que se mantiene otra analítica de relación rara proceso–destino. La…</a:t>
             </a:r>
           </a:p>
         </p:txBody>
@@ -4778,7 +5424,7 @@
                   <a:srgbClr val="0B3D2E"/>
                 </a:solidFill>
               </a:rPr>
-              <a:t>📝 Reto verificable</a:t>
+              <a:t>✅ Criterio de dominio</a:t>
             </a:r>
           </a:p>
         </p:txBody>
@@ -4816,7 +5462,7 @@
                   <a:srgbClr val="22282E"/>
                 </a:solidFill>
               </a:rPr>
-              <a:t>•  Detecta un beacon generado en tu laboratorio combinando análisis temporal (periodicidad) y correlación con el proceso de endpoint. Criterio de aceptación: identificas el par origen-destino del beacon con su intervalo aproximado y jitter, justificas la detección con datos estadísticos (baja varianza), y enlazas la conexión con el proceso concreto que la origina en el host.</a:t>
+              <a:t>•  El alumno explica intervalos, jitter, ventana y baseline; descarta al menos una alternativa benigna; correlaciona endpoint; y declara límites de cifrado y visibilidad. Un dominio «raro» sin…</a:t>
             </a:r>
           </a:p>
         </p:txBody>
